--- a/output/1_1.pptx
+++ b/output/1_1.pptx
@@ -3174,8 +3174,8 @@
         </p:nvCxnSpPr>
         <p:spPr>
           <a:xfrm flipV="1">
-            <a:off x="4594860.0" y="2459736.0"/>
-            <a:ext cx="36118.799999999814" cy="66751.20000000019"/>
+            <a:off x="4572000.0" y="2480310.0"/>
+            <a:ext cx="45720.0" cy="91440.0"/>
           </a:xfrm>
           <a:prstGeom prst="line">
             <a:avLst/>
@@ -3209,8 +3209,8 @@
         </p:nvCxnSpPr>
         <p:spPr>
           <a:xfrm flipV="1">
-            <a:off x="4630978.8" y="2396185.2"/>
-            <a:ext cx="36118.799999999814" cy="63550.799999999814"/>
+            <a:off x="4617720.0" y="2420874.0"/>
+            <a:ext cx="45720.0" cy="59436.0"/>
           </a:xfrm>
           <a:prstGeom prst="line">
             <a:avLst/>
@@ -3244,8 +3244,8 @@
         </p:nvCxnSpPr>
         <p:spPr>
           <a:xfrm flipV="1">
-            <a:off x="4667097.6" y="2334920.4"/>
-            <a:ext cx="36576.0" cy="61264.80000000028"/>
+            <a:off x="4663440.0" y="2370582.0"/>
+            <a:ext cx="45720.0" cy="50292.0"/>
           </a:xfrm>
           <a:prstGeom prst="line">
             <a:avLst/>
@@ -3279,8 +3279,8 @@
         </p:nvCxnSpPr>
         <p:spPr>
           <a:xfrm flipV="1">
-            <a:off x="4703673.6" y="2276856.0"/>
-            <a:ext cx="36118.800000000745" cy="58064.39999999991"/>
+            <a:off x="4709160.0" y="2329434.0"/>
+            <a:ext cx="45720.0" cy="41148.0"/>
           </a:xfrm>
           <a:prstGeom prst="line">
             <a:avLst/>
@@ -3314,8 +3314,8 @@
         </p:nvCxnSpPr>
         <p:spPr>
           <a:xfrm flipV="1">
-            <a:off x="4739792.4" y="2221077.6"/>
-            <a:ext cx="36118.799999999814" cy="55778.39999999991"/>
+            <a:off x="4754880.0" y="2288286.0"/>
+            <a:ext cx="45720.0" cy="41148.0"/>
           </a:xfrm>
           <a:prstGeom prst="line">
             <a:avLst/>
@@ -3349,8 +3349,8 @@
         </p:nvCxnSpPr>
         <p:spPr>
           <a:xfrm flipV="1">
-            <a:off x="4775911.2" y="2168499.6"/>
-            <a:ext cx="36118.799999999814" cy="52578.0"/>
+            <a:off x="4800600.0" y="2251710.0"/>
+            <a:ext cx="45720.0" cy="36576.0"/>
           </a:xfrm>
           <a:prstGeom prst="line">
             <a:avLst/>
@@ -3384,8 +3384,8 @@
         </p:nvCxnSpPr>
         <p:spPr>
           <a:xfrm flipV="1">
-            <a:off x="4812030.0" y="2118664.8"/>
-            <a:ext cx="36118.799999999814" cy="49834.80000000028"/>
+            <a:off x="4846320.0" y="2219706.0"/>
+            <a:ext cx="45720.0" cy="32004.0"/>
           </a:xfrm>
           <a:prstGeom prst="line">
             <a:avLst/>
@@ -3419,8 +3419,8 @@
         </p:nvCxnSpPr>
         <p:spPr>
           <a:xfrm flipV="1">
-            <a:off x="4848148.8" y="2071573.2"/>
-            <a:ext cx="36118.799999999814" cy="47091.59999999986"/>
+            <a:off x="4892040.0" y="2187702.0"/>
+            <a:ext cx="45720.0" cy="32004.0"/>
           </a:xfrm>
           <a:prstGeom prst="line">
             <a:avLst/>
@@ -3454,8 +3454,8 @@
         </p:nvCxnSpPr>
         <p:spPr>
           <a:xfrm flipV="1">
-            <a:off x="4884267.6" y="2027224.7999999998"/>
-            <a:ext cx="36576.0" cy="44348.40000000014"/>
+            <a:off x="4937760.0" y="2155698.0"/>
+            <a:ext cx="45720.0" cy="32004.0"/>
           </a:xfrm>
           <a:prstGeom prst="line">
             <a:avLst/>
@@ -3489,8 +3489,8 @@
         </p:nvCxnSpPr>
         <p:spPr>
           <a:xfrm flipV="1">
-            <a:off x="4920843.6" y="1985619.6"/>
-            <a:ext cx="36118.800000000745" cy="41605.19999999972"/>
+            <a:off x="4983480.0" y="2128266.0"/>
+            <a:ext cx="45720.0" cy="27432.0"/>
           </a:xfrm>
           <a:prstGeom prst="line">
             <a:avLst/>
@@ -3524,8 +3524,8 @@
         </p:nvCxnSpPr>
         <p:spPr>
           <a:xfrm flipV="1">
-            <a:off x="4956962.4" y="1947214.7999999998"/>
-            <a:ext cx="36118.799999999814" cy="38404.80000000028"/>
+            <a:off x="5029200.0" y="2100834.0"/>
+            <a:ext cx="45720.0" cy="27432.0"/>
           </a:xfrm>
           <a:prstGeom prst="line">
             <a:avLst/>
@@ -3559,8 +3559,8 @@
         </p:nvCxnSpPr>
         <p:spPr>
           <a:xfrm flipV="1">
-            <a:off x="4993081.2" y="1910638.8"/>
-            <a:ext cx="36118.799999999814" cy="36575.99999999977"/>
+            <a:off x="5074920.0" y="2073402.0"/>
+            <a:ext cx="45720.0" cy="27432.0"/>
           </a:xfrm>
           <a:prstGeom prst="line">
             <a:avLst/>
@@ -3594,8 +3594,8 @@
         </p:nvCxnSpPr>
         <p:spPr>
           <a:xfrm flipV="1">
-            <a:off x="5029200.0" y="1877263.2000000002"/>
-            <a:ext cx="36118.799999999814" cy="33375.59999999986"/>
+            <a:off x="5120640.0" y="2045970.0"/>
+            <a:ext cx="45720.0" cy="27432.0"/>
           </a:xfrm>
           <a:prstGeom prst="line">
             <a:avLst/>
@@ -3629,8 +3629,8 @@
         </p:nvCxnSpPr>
         <p:spPr>
           <a:xfrm flipV="1">
-            <a:off x="5065318.8" y="1846630.7999999998"/>
-            <a:ext cx="36118.799999999814" cy="30632.400000000373"/>
+            <a:off x="5166360.0" y="2023110.0"/>
+            <a:ext cx="45720.0" cy="22860.0"/>
           </a:xfrm>
           <a:prstGeom prst="line">
             <a:avLst/>
@@ -3664,8 +3664,8 @@
         </p:nvCxnSpPr>
         <p:spPr>
           <a:xfrm flipV="1">
-            <a:off x="5101437.6" y="1818284.4"/>
-            <a:ext cx="36576.0" cy="28346.399999999907"/>
+            <a:off x="5212080.0" y="1995678.0"/>
+            <a:ext cx="45720.0" cy="27432.0"/>
           </a:xfrm>
           <a:prstGeom prst="line">
             <a:avLst/>
@@ -3699,8 +3699,8 @@
         </p:nvCxnSpPr>
         <p:spPr>
           <a:xfrm flipV="1">
-            <a:off x="5138013.6" y="1793138.4"/>
-            <a:ext cx="36118.800000000745" cy="25146.0"/>
+            <a:off x="5257800.0" y="1972818.0"/>
+            <a:ext cx="45720.0" cy="22860.0"/>
           </a:xfrm>
           <a:prstGeom prst="line">
             <a:avLst/>
@@ -3734,8 +3734,8 @@
         </p:nvCxnSpPr>
         <p:spPr>
           <a:xfrm flipV="1">
-            <a:off x="5174132.4" y="1770735.6"/>
-            <a:ext cx="36118.799999999814" cy="22402.799999999814"/>
+            <a:off x="5303520.0" y="1949958.0"/>
+            <a:ext cx="45720.0" cy="22860.0"/>
           </a:xfrm>
           <a:prstGeom prst="line">
             <a:avLst/>
@@ -3769,8 +3769,8 @@
         </p:nvCxnSpPr>
         <p:spPr>
           <a:xfrm flipV="1">
-            <a:off x="5210251.2" y="1751076.0"/>
-            <a:ext cx="36118.799999999814" cy="19659.600000000093"/>
+            <a:off x="5349240.0" y="1927098.0"/>
+            <a:ext cx="45720.0" cy="22860.0"/>
           </a:xfrm>
           <a:prstGeom prst="line">
             <a:avLst/>
@@ -3804,8 +3804,8 @@
         </p:nvCxnSpPr>
         <p:spPr>
           <a:xfrm flipV="1">
-            <a:off x="5246370.0" y="1734616.8"/>
-            <a:ext cx="36118.799999999814" cy="16459.199999999953"/>
+            <a:off x="5394960.0" y="1904238.0"/>
+            <a:ext cx="45720.0" cy="22860.0"/>
           </a:xfrm>
           <a:prstGeom prst="line">
             <a:avLst/>
@@ -3839,8 +3839,8 @@
         </p:nvCxnSpPr>
         <p:spPr>
           <a:xfrm flipV="1">
-            <a:off x="5282488.8" y="1720443.6"/>
-            <a:ext cx="36118.799999999814" cy="14173.199999999953"/>
+            <a:off x="5440680.0" y="1895094.0"/>
+            <a:ext cx="22860.0" cy="9144.0"/>
           </a:xfrm>
           <a:prstGeom prst="line">
             <a:avLst/>
@@ -3874,8 +3874,8 @@
         </p:nvCxnSpPr>
         <p:spPr>
           <a:xfrm flipV="1">
-            <a:off x="5318607.6" y="1709470.8"/>
-            <a:ext cx="36576.0" cy="10972.800000000047"/>
+            <a:off x="5463540.0" y="1876806.0"/>
+            <a:ext cx="45720.0" cy="18288.0"/>
           </a:xfrm>
           <a:prstGeom prst="line">
             <a:avLst/>
@@ -3909,8 +3909,8 @@
         </p:nvCxnSpPr>
         <p:spPr>
           <a:xfrm flipV="1">
-            <a:off x="5355183.6" y="1700784.0"/>
-            <a:ext cx="36118.800000000745" cy="8686.800000000047"/>
+            <a:off x="5509260.0" y="1867662.0"/>
+            <a:ext cx="22860.0" cy="9144.0"/>
           </a:xfrm>
           <a:prstGeom prst="line">
             <a:avLst/>
@@ -3944,8 +3944,8 @@
         </p:nvCxnSpPr>
         <p:spPr>
           <a:xfrm flipV="1">
-            <a:off x="5391302.4" y="1695297.6"/>
-            <a:ext cx="36118.799999999814" cy="5486.399999999907"/>
+            <a:off x="5532120.0" y="1858518.0"/>
+            <a:ext cx="45720.0" cy="9144.0"/>
           </a:xfrm>
           <a:prstGeom prst="line">
             <a:avLst/>
@@ -3979,8 +3979,8 @@
         </p:nvCxnSpPr>
         <p:spPr>
           <a:xfrm flipV="1">
-            <a:off x="5427421.2" y="1692097.2000000002"/>
-            <a:ext cx="36118.799999999814" cy="3200.399999999907"/>
+            <a:off x="5577840.0" y="1849374.0"/>
+            <a:ext cx="45720.0" cy="9144.0"/>
           </a:xfrm>
           <a:prstGeom prst="line">
             <a:avLst/>
@@ -4006,15 +4006,50 @@
           </a:fontRef>
         </p:style>
       </p:cxnSp>
-      <p:sp>
-        <p:nvSpPr>
-          <p:cNvPr id="28" name="Oval 27"/>
+      <p:cxnSp>
+        <p:nvCxnSpPr>
+          <p:cNvPr id="28" name="Connector 27"/>
+          <p:cNvCxnSpPr/>
+          <p:nvPr/>
+        </p:nvCxnSpPr>
+        <p:spPr>
+          <a:xfrm flipV="1">
+            <a:off x="5623560.0" y="1840230.0"/>
+            <a:ext cx="45720.0" cy="9144.0"/>
+          </a:xfrm>
+          <a:prstGeom prst="line">
+            <a:avLst/>
+          </a:prstGeom>
+          <a:ln w="25400">
+            <a:solidFill>
+              <a:srgbClr val="00C8FF"/>
+            </a:solidFill>
+          </a:ln>
+        </p:spPr>
+        <p:style>
+          <a:lnRef idx="2">
+            <a:schemeClr val="accent1"/>
+          </a:lnRef>
+          <a:fillRef idx="0">
+            <a:schemeClr val="accent1"/>
+          </a:fillRef>
+          <a:effectRef idx="1">
+            <a:schemeClr val="accent1"/>
+          </a:effectRef>
+          <a:fontRef idx="minor">
+            <a:schemeClr val="tx1"/>
+          </a:fontRef>
+        </p:style>
+      </p:cxnSp>
+      <p:sp>
+        <p:nvSpPr>
+          <p:cNvPr id="29" name="Oval 28"/>
           <p:cNvSpPr/>
           <p:nvPr/>
         </p:nvSpPr>
         <p:spPr>
           <a:xfrm>
-            <a:off x="5448300" y="1619250"/>
+            <a:off x="5448300" y="1847850"/>
             <a:ext cx="76200" cy="76200"/>
           </a:xfrm>
           <a:prstGeom prst="ellipse">
@@ -4051,13 +4086,13 @@
       </p:sp>
       <p:sp>
         <p:nvSpPr>
-          <p:cNvPr id="29" name="TextBox 28"/>
+          <p:cNvPr id="30" name="TextBox 29"/>
           <p:cNvSpPr txBox="1"/>
           <p:nvPr/>
         </p:nvSpPr>
         <p:spPr>
           <a:xfrm>
-            <a:off x="5532120" y="1520190"/>
+            <a:off x="4503420" y="2640330"/>
             <a:ext cx="635000" cy="254000"/>
           </a:xfrm>
           <a:prstGeom prst="rect">
@@ -4080,20 +4115,20 @@
               </a:defRPr>
             </a:pPr>
             <a:r>
-              <a:t>$y=f(x)$</a:t>
-            </a:r>
-          </a:p>
-        </p:txBody>
-      </p:sp>
-      <p:sp>
-        <p:nvSpPr>
-          <p:cNvPr id="30" name="TextBox 29"/>
+              <a:t>O</a:t>
+            </a:r>
+          </a:p>
+        </p:txBody>
+      </p:sp>
+      <p:sp>
+        <p:nvSpPr>
+          <p:cNvPr id="31" name="TextBox 30"/>
           <p:cNvSpPr txBox="1"/>
           <p:nvPr/>
         </p:nvSpPr>
         <p:spPr>
           <a:xfrm>
-            <a:off x="4480560" y="1657350"/>
+            <a:off x="5760720" y="2640330"/>
             <a:ext cx="635000" cy="254000"/>
           </a:xfrm>
           <a:prstGeom prst="rect">
@@ -4116,20 +4151,20 @@
               </a:defRPr>
             </a:pPr>
             <a:r>
-              <a:t>$L$</a:t>
-            </a:r>
-          </a:p>
-        </p:txBody>
-      </p:sp>
-      <p:sp>
-        <p:nvSpPr>
-          <p:cNvPr id="31" name="TextBox 30"/>
+              <a:t>x</a:t>
+            </a:r>
+          </a:p>
+        </p:txBody>
+      </p:sp>
+      <p:sp>
+        <p:nvSpPr>
+          <p:cNvPr id="32" name="TextBox 31"/>
           <p:cNvSpPr txBox="1"/>
           <p:nvPr/>
         </p:nvSpPr>
         <p:spPr>
           <a:xfrm>
-            <a:off x="5486400" y="2663190"/>
+            <a:off x="4503420" y="1703070"/>
             <a:ext cx="635000" cy="254000"/>
           </a:xfrm>
           <a:prstGeom prst="rect">
@@ -4152,20 +4187,20 @@
               </a:defRPr>
             </a:pPr>
             <a:r>
-              <a:t>$a$</a:t>
-            </a:r>
-          </a:p>
-        </p:txBody>
-      </p:sp>
-      <p:sp>
-        <p:nvSpPr>
-          <p:cNvPr id="32" name="TextBox 31"/>
+              <a:t>y</a:t>
+            </a:r>
+          </a:p>
+        </p:txBody>
+      </p:sp>
+      <p:sp>
+        <p:nvSpPr>
+          <p:cNvPr id="33" name="TextBox 32"/>
           <p:cNvSpPr txBox="1"/>
           <p:nvPr/>
         </p:nvSpPr>
         <p:spPr>
           <a:xfrm>
-            <a:off x="4526280" y="2617470"/>
+            <a:off x="5486400" y="2640330"/>
             <a:ext cx="635000" cy="254000"/>
           </a:xfrm>
           <a:prstGeom prst="rect">
@@ -4188,7 +4223,79 @@
               </a:defRPr>
             </a:pPr>
             <a:r>
-              <a:t>$O$</a:t>
+              <a:t>a</a:t>
+            </a:r>
+          </a:p>
+        </p:txBody>
+      </p:sp>
+      <p:sp>
+        <p:nvSpPr>
+          <p:cNvPr id="34" name="TextBox 33"/>
+          <p:cNvSpPr txBox="1"/>
+          <p:nvPr/>
+        </p:nvSpPr>
+        <p:spPr>
+          <a:xfrm>
+            <a:off x="4503420" y="1885950"/>
+            <a:ext cx="635000" cy="254000"/>
+          </a:xfrm>
+          <a:prstGeom prst="rect">
+            <a:avLst/>
+          </a:prstGeom>
+          <a:noFill/>
+        </p:spPr>
+        <p:txBody>
+          <a:bodyPr wrap="none">
+            <a:spAutoFit/>
+          </a:bodyPr>
+          <a:lstStyle/>
+          <a:p>
+            <a:pPr>
+              <a:defRPr sz="1200">
+                <a:solidFill>
+                  <a:srgbClr val="FFFFFF"/>
+                </a:solidFill>
+                <a:latin typeface="Inter"/>
+              </a:defRPr>
+            </a:pPr>
+            <a:r>
+              <a:t>L</a:t>
+            </a:r>
+          </a:p>
+        </p:txBody>
+      </p:sp>
+      <p:sp>
+        <p:nvSpPr>
+          <p:cNvPr id="35" name="TextBox 34"/>
+          <p:cNvSpPr txBox="1"/>
+          <p:nvPr/>
+        </p:nvSpPr>
+        <p:spPr>
+          <a:xfrm>
+            <a:off x="5577840" y="1794510"/>
+            <a:ext cx="635000" cy="254000"/>
+          </a:xfrm>
+          <a:prstGeom prst="rect">
+            <a:avLst/>
+          </a:prstGeom>
+          <a:noFill/>
+        </p:spPr>
+        <p:txBody>
+          <a:bodyPr wrap="none">
+            <a:spAutoFit/>
+          </a:bodyPr>
+          <a:lstStyle/>
+          <a:p>
+            <a:pPr>
+              <a:defRPr sz="1200">
+                <a:solidFill>
+                  <a:srgbClr val="FFFFFF"/>
+                </a:solidFill>
+                <a:latin typeface="Inter"/>
+              </a:defRPr>
+            </a:pPr>
+            <a:r>
+              <a:t>y=f(x)</a:t>
             </a:r>
           </a:p>
         </p:txBody>

--- a/output/1_1.pptx
+++ b/output/1_1.pptx
@@ -3174,8 +3174,8 @@
         </p:nvCxnSpPr>
         <p:spPr>
           <a:xfrm flipV="1">
-            <a:off x="4572000.0" y="2480310.0"/>
-            <a:ext cx="45720.0" cy="91440.0"/>
+            <a:off x="4572000.0" y="2570744.16"/>
+            <a:ext cx="21534.12000000011" cy="1005.839999999851"/>
           </a:xfrm>
           <a:prstGeom prst="line">
             <a:avLst/>
@@ -3209,8 +3209,8 @@
         </p:nvCxnSpPr>
         <p:spPr>
           <a:xfrm flipV="1">
-            <a:off x="4617720.0" y="2420874.0"/>
-            <a:ext cx="45720.0" cy="59436.0"/>
+            <a:off x="4593534.12" y="2567680.92"/>
+            <a:ext cx="21579.83999999985" cy="3063.2400000002235"/>
           </a:xfrm>
           <a:prstGeom prst="line">
             <a:avLst/>
@@ -3244,8 +3244,8 @@
         </p:nvCxnSpPr>
         <p:spPr>
           <a:xfrm flipV="1">
-            <a:off x="4663440.0" y="2370582.0"/>
-            <a:ext cx="45720.0" cy="50292.0"/>
+            <a:off x="4615113.96" y="2562606.0"/>
+            <a:ext cx="21534.12000000011" cy="5074.9199999999255"/>
           </a:xfrm>
           <a:prstGeom prst="line">
             <a:avLst/>
@@ -3279,8 +3279,8 @@
         </p:nvCxnSpPr>
         <p:spPr>
           <a:xfrm flipV="1">
-            <a:off x="4709160.0" y="2329434.0"/>
-            <a:ext cx="45720.0" cy="41148.0"/>
+            <a:off x="4636648.08" y="2555473.68"/>
+            <a:ext cx="21579.83999999985" cy="7132.319999999832"/>
           </a:xfrm>
           <a:prstGeom prst="line">
             <a:avLst/>
@@ -3314,8 +3314,8 @@
         </p:nvCxnSpPr>
         <p:spPr>
           <a:xfrm flipV="1">
-            <a:off x="4754880.0" y="2288286.0"/>
-            <a:ext cx="45720.0" cy="41148.0"/>
+            <a:off x="4658227.92" y="2546329.68"/>
+            <a:ext cx="21534.12000000011" cy="9144.0"/>
           </a:xfrm>
           <a:prstGeom prst="line">
             <a:avLst/>
@@ -3349,8 +3349,8 @@
         </p:nvCxnSpPr>
         <p:spPr>
           <a:xfrm flipV="1">
-            <a:off x="4800600.0" y="2251710.0"/>
-            <a:ext cx="45720.0" cy="36576.0"/>
+            <a:off x="4679762.04" y="2535174.0"/>
+            <a:ext cx="21579.83999999985" cy="11155.680000000168"/>
           </a:xfrm>
           <a:prstGeom prst="line">
             <a:avLst/>
@@ -3384,8 +3384,8 @@
         </p:nvCxnSpPr>
         <p:spPr>
           <a:xfrm flipV="1">
-            <a:off x="4846320.0" y="2219706.0"/>
-            <a:ext cx="45720.0" cy="32004.0"/>
+            <a:off x="4701341.88" y="2521960.92"/>
+            <a:ext cx="21579.83999999985" cy="13213.080000000075"/>
           </a:xfrm>
           <a:prstGeom prst="line">
             <a:avLst/>
@@ -3419,8 +3419,8 @@
         </p:nvCxnSpPr>
         <p:spPr>
           <a:xfrm flipV="1">
-            <a:off x="4892040.0" y="2187702.0"/>
-            <a:ext cx="45720.0" cy="32004.0"/>
+            <a:off x="4722921.72" y="2506690.44"/>
+            <a:ext cx="21534.12000000011" cy="15270.479999999981"/>
           </a:xfrm>
           <a:prstGeom prst="line">
             <a:avLst/>
@@ -3454,8 +3454,8 @@
         </p:nvCxnSpPr>
         <p:spPr>
           <a:xfrm flipV="1">
-            <a:off x="4937760.0" y="2155698.0"/>
-            <a:ext cx="45720.0" cy="32004.0"/>
+            <a:off x="4744455.84" y="2489408.28"/>
+            <a:ext cx="21579.83999999985" cy="17282.16000000015"/>
           </a:xfrm>
           <a:prstGeom prst="line">
             <a:avLst/>
@@ -3489,8 +3489,8 @@
         </p:nvCxnSpPr>
         <p:spPr>
           <a:xfrm flipV="1">
-            <a:off x="4983480.0" y="2128266.0"/>
-            <a:ext cx="45720.0" cy="27432.0"/>
+            <a:off x="4766035.68" y="2470114.44"/>
+            <a:ext cx="21534.12000000011" cy="19293.83999999985"/>
           </a:xfrm>
           <a:prstGeom prst="line">
             <a:avLst/>
@@ -3524,8 +3524,8 @@
         </p:nvCxnSpPr>
         <p:spPr>
           <a:xfrm flipV="1">
-            <a:off x="5029200.0" y="2100834.0"/>
-            <a:ext cx="45720.0" cy="27432.0"/>
+            <a:off x="4787569.8" y="2448717.48"/>
+            <a:ext cx="21579.83999999985" cy="21396.959999999963"/>
           </a:xfrm>
           <a:prstGeom prst="line">
             <a:avLst/>
@@ -3559,8 +3559,8 @@
         </p:nvCxnSpPr>
         <p:spPr>
           <a:xfrm flipV="1">
-            <a:off x="5074920.0" y="2073402.0"/>
-            <a:ext cx="45720.0" cy="27432.0"/>
+            <a:off x="4809149.64" y="2425354.56"/>
+            <a:ext cx="21579.840000000782" cy="23362.919999999925"/>
           </a:xfrm>
           <a:prstGeom prst="line">
             <a:avLst/>
@@ -3594,8 +3594,8 @@
         </p:nvCxnSpPr>
         <p:spPr>
           <a:xfrm flipV="1">
-            <a:off x="5120640.0" y="2045970.0"/>
-            <a:ext cx="45720.0" cy="27432.0"/>
+            <a:off x="4830729.48" y="2399934.24"/>
+            <a:ext cx="21534.11999999918" cy="25420.319999999832"/>
           </a:xfrm>
           <a:prstGeom prst="line">
             <a:avLst/>
@@ -3629,8 +3629,8 @@
         </p:nvCxnSpPr>
         <p:spPr>
           <a:xfrm flipV="1">
-            <a:off x="5166360.0" y="2023110.0"/>
-            <a:ext cx="45720.0" cy="22860.0"/>
+            <a:off x="4852263.6" y="2372502.24"/>
+            <a:ext cx="21579.840000000782" cy="27432.0"/>
           </a:xfrm>
           <a:prstGeom prst="line">
             <a:avLst/>
@@ -3664,8 +3664,8 @@
         </p:nvCxnSpPr>
         <p:spPr>
           <a:xfrm flipV="1">
-            <a:off x="5212080.0" y="1995678.0"/>
-            <a:ext cx="45720.0" cy="27432.0"/>
+            <a:off x="4873843.44" y="2343012.84"/>
+            <a:ext cx="21534.11999999918" cy="29489.400000000373"/>
           </a:xfrm>
           <a:prstGeom prst="line">
             <a:avLst/>
@@ -3699,8 +3699,8 @@
         </p:nvCxnSpPr>
         <p:spPr>
           <a:xfrm flipV="1">
-            <a:off x="5257800.0" y="1972818.0"/>
-            <a:ext cx="45720.0" cy="22860.0"/>
+            <a:off x="4895377.56" y="2311466.04"/>
+            <a:ext cx="21579.840000000782" cy="31546.799999999814"/>
           </a:xfrm>
           <a:prstGeom prst="line">
             <a:avLst/>
@@ -3734,8 +3734,8 @@
         </p:nvCxnSpPr>
         <p:spPr>
           <a:xfrm flipV="1">
-            <a:off x="5303520.0" y="1949958.0"/>
-            <a:ext cx="45720.0" cy="22860.0"/>
+            <a:off x="4916957.4" y="2277953.2800000003"/>
+            <a:ext cx="21534.11999999918" cy="33512.75999999978"/>
           </a:xfrm>
           <a:prstGeom prst="line">
             <a:avLst/>
@@ -3769,8 +3769,8 @@
         </p:nvCxnSpPr>
         <p:spPr>
           <a:xfrm flipV="1">
-            <a:off x="5349240.0" y="1927098.0"/>
-            <a:ext cx="45720.0" cy="22860.0"/>
+            <a:off x="4938491.52" y="2242337.4"/>
+            <a:ext cx="21579.840000000782" cy="35615.880000000354"/>
           </a:xfrm>
           <a:prstGeom prst="line">
             <a:avLst/>
@@ -3804,8 +3804,8 @@
         </p:nvCxnSpPr>
         <p:spPr>
           <a:xfrm flipV="1">
-            <a:off x="5394960.0" y="1904238.0"/>
-            <a:ext cx="45720.0" cy="22860.0"/>
+            <a:off x="4960071.36" y="2204709.84"/>
+            <a:ext cx="21579.83999999985" cy="37627.560000000056"/>
           </a:xfrm>
           <a:prstGeom prst="line">
             <a:avLst/>
@@ -3839,8 +3839,8 @@
         </p:nvCxnSpPr>
         <p:spPr>
           <a:xfrm flipV="1">
-            <a:off x="5440680.0" y="1895094.0"/>
-            <a:ext cx="22860.0" cy="9144.0"/>
+            <a:off x="4981651.2" y="2165116.32"/>
+            <a:ext cx="21534.12000000011" cy="39593.52000000002"/>
           </a:xfrm>
           <a:prstGeom prst="line">
             <a:avLst/>
@@ -3874,8 +3874,8 @@
         </p:nvCxnSpPr>
         <p:spPr>
           <a:xfrm flipV="1">
-            <a:off x="5463540.0" y="1876806.0"/>
-            <a:ext cx="45720.0" cy="18288.0"/>
+            <a:off x="5003185.32" y="2123373.96"/>
+            <a:ext cx="21579.83999999985" cy="41742.35999999987"/>
           </a:xfrm>
           <a:prstGeom prst="line">
             <a:avLst/>
@@ -3901,155 +3901,15 @@
           </a:fontRef>
         </p:style>
       </p:cxnSp>
-      <p:cxnSp>
-        <p:nvCxnSpPr>
-          <p:cNvPr id="25" name="Connector 24"/>
-          <p:cNvCxnSpPr/>
-          <p:nvPr/>
-        </p:nvCxnSpPr>
-        <p:spPr>
-          <a:xfrm flipV="1">
-            <a:off x="5509260.0" y="1867662.0"/>
-            <a:ext cx="22860.0" cy="9144.0"/>
-          </a:xfrm>
-          <a:prstGeom prst="line">
-            <a:avLst/>
-          </a:prstGeom>
-          <a:ln w="25400">
-            <a:solidFill>
-              <a:srgbClr val="00C8FF"/>
-            </a:solidFill>
-          </a:ln>
-        </p:spPr>
-        <p:style>
-          <a:lnRef idx="2">
-            <a:schemeClr val="accent1"/>
-          </a:lnRef>
-          <a:fillRef idx="0">
-            <a:schemeClr val="accent1"/>
-          </a:fillRef>
-          <a:effectRef idx="1">
-            <a:schemeClr val="accent1"/>
-          </a:effectRef>
-          <a:fontRef idx="minor">
-            <a:schemeClr val="tx1"/>
-          </a:fontRef>
-        </p:style>
-      </p:cxnSp>
-      <p:cxnSp>
-        <p:nvCxnSpPr>
-          <p:cNvPr id="26" name="Connector 25"/>
-          <p:cNvCxnSpPr/>
-          <p:nvPr/>
-        </p:nvCxnSpPr>
-        <p:spPr>
-          <a:xfrm flipV="1">
-            <a:off x="5532120.0" y="1858518.0"/>
-            <a:ext cx="45720.0" cy="9144.0"/>
-          </a:xfrm>
-          <a:prstGeom prst="line">
-            <a:avLst/>
-          </a:prstGeom>
-          <a:ln w="25400">
-            <a:solidFill>
-              <a:srgbClr val="00C8FF"/>
-            </a:solidFill>
-          </a:ln>
-        </p:spPr>
-        <p:style>
-          <a:lnRef idx="2">
-            <a:schemeClr val="accent1"/>
-          </a:lnRef>
-          <a:fillRef idx="0">
-            <a:schemeClr val="accent1"/>
-          </a:fillRef>
-          <a:effectRef idx="1">
-            <a:schemeClr val="accent1"/>
-          </a:effectRef>
-          <a:fontRef idx="minor">
-            <a:schemeClr val="tx1"/>
-          </a:fontRef>
-        </p:style>
-      </p:cxnSp>
-      <p:cxnSp>
-        <p:nvCxnSpPr>
-          <p:cNvPr id="27" name="Connector 26"/>
-          <p:cNvCxnSpPr/>
-          <p:nvPr/>
-        </p:nvCxnSpPr>
-        <p:spPr>
-          <a:xfrm flipV="1">
-            <a:off x="5577840.0" y="1849374.0"/>
-            <a:ext cx="45720.0" cy="9144.0"/>
-          </a:xfrm>
-          <a:prstGeom prst="line">
-            <a:avLst/>
-          </a:prstGeom>
-          <a:ln w="25400">
-            <a:solidFill>
-              <a:srgbClr val="00C8FF"/>
-            </a:solidFill>
-          </a:ln>
-        </p:spPr>
-        <p:style>
-          <a:lnRef idx="2">
-            <a:schemeClr val="accent1"/>
-          </a:lnRef>
-          <a:fillRef idx="0">
-            <a:schemeClr val="accent1"/>
-          </a:fillRef>
-          <a:effectRef idx="1">
-            <a:schemeClr val="accent1"/>
-          </a:effectRef>
-          <a:fontRef idx="minor">
-            <a:schemeClr val="tx1"/>
-          </a:fontRef>
-        </p:style>
-      </p:cxnSp>
-      <p:cxnSp>
-        <p:nvCxnSpPr>
-          <p:cNvPr id="28" name="Connector 27"/>
-          <p:cNvCxnSpPr/>
-          <p:nvPr/>
-        </p:nvCxnSpPr>
-        <p:spPr>
-          <a:xfrm flipV="1">
-            <a:off x="5623560.0" y="1840230.0"/>
-            <a:ext cx="45720.0" cy="9144.0"/>
-          </a:xfrm>
-          <a:prstGeom prst="line">
-            <a:avLst/>
-          </a:prstGeom>
-          <a:ln w="25400">
-            <a:solidFill>
-              <a:srgbClr val="00C8FF"/>
-            </a:solidFill>
-          </a:ln>
-        </p:spPr>
-        <p:style>
-          <a:lnRef idx="2">
-            <a:schemeClr val="accent1"/>
-          </a:lnRef>
-          <a:fillRef idx="0">
-            <a:schemeClr val="accent1"/>
-          </a:fillRef>
-          <a:effectRef idx="1">
-            <a:schemeClr val="accent1"/>
-          </a:effectRef>
-          <a:fontRef idx="minor">
-            <a:schemeClr val="tx1"/>
-          </a:fontRef>
-        </p:style>
-      </p:cxnSp>
-      <p:sp>
-        <p:nvSpPr>
-          <p:cNvPr id="29" name="Oval 28"/>
+      <p:sp>
+        <p:nvSpPr>
+          <p:cNvPr id="25" name="Oval 24"/>
           <p:cNvSpPr/>
           <p:nvPr/>
         </p:nvSpPr>
         <p:spPr>
           <a:xfrm>
-            <a:off x="5448300" y="1847850"/>
+            <a:off x="4991100" y="2076450"/>
             <a:ext cx="76200" cy="76200"/>
           </a:xfrm>
           <a:prstGeom prst="ellipse">
@@ -4086,13 +3946,13 @@
       </p:sp>
       <p:sp>
         <p:nvSpPr>
-          <p:cNvPr id="30" name="TextBox 29"/>
+          <p:cNvPr id="26" name="TextBox 25"/>
           <p:cNvSpPr txBox="1"/>
           <p:nvPr/>
         </p:nvSpPr>
         <p:spPr>
           <a:xfrm>
-            <a:off x="4503420" y="2640330"/>
+            <a:off x="5052060" y="2068830"/>
             <a:ext cx="635000" cy="254000"/>
           </a:xfrm>
           <a:prstGeom prst="rect">
@@ -4115,20 +3975,20 @@
               </a:defRPr>
             </a:pPr>
             <a:r>
-              <a:t>O</a:t>
-            </a:r>
-          </a:p>
-        </p:txBody>
-      </p:sp>
-      <p:sp>
-        <p:nvSpPr>
-          <p:cNvPr id="31" name="TextBox 30"/>
+              <a:t>y=f(x)</a:t>
+            </a:r>
+          </a:p>
+        </p:txBody>
+      </p:sp>
+      <p:sp>
+        <p:nvSpPr>
+          <p:cNvPr id="27" name="TextBox 26"/>
           <p:cNvSpPr txBox="1"/>
           <p:nvPr/>
         </p:nvSpPr>
         <p:spPr>
           <a:xfrm>
-            <a:off x="5760720" y="2640330"/>
+            <a:off x="4526280" y="2617470"/>
             <a:ext cx="635000" cy="254000"/>
           </a:xfrm>
           <a:prstGeom prst="rect">
@@ -4151,20 +4011,20 @@
               </a:defRPr>
             </a:pPr>
             <a:r>
-              <a:t>x</a:t>
-            </a:r>
-          </a:p>
-        </p:txBody>
-      </p:sp>
-      <p:sp>
-        <p:nvSpPr>
-          <p:cNvPr id="32" name="TextBox 31"/>
+              <a:t>O</a:t>
+            </a:r>
+          </a:p>
+        </p:txBody>
+      </p:sp>
+      <p:sp>
+        <p:nvSpPr>
+          <p:cNvPr id="28" name="TextBox 27"/>
           <p:cNvSpPr txBox="1"/>
           <p:nvPr/>
         </p:nvSpPr>
         <p:spPr>
           <a:xfrm>
-            <a:off x="4503420" y="1703070"/>
+            <a:off x="5074920" y="2617470"/>
             <a:ext cx="635000" cy="254000"/>
           </a:xfrm>
           <a:prstGeom prst="rect">
@@ -4187,20 +4047,20 @@
               </a:defRPr>
             </a:pPr>
             <a:r>
-              <a:t>y</a:t>
-            </a:r>
-          </a:p>
-        </p:txBody>
-      </p:sp>
-      <p:sp>
-        <p:nvSpPr>
-          <p:cNvPr id="33" name="TextBox 32"/>
+              <a:t>x</a:t>
+            </a:r>
+          </a:p>
+        </p:txBody>
+      </p:sp>
+      <p:sp>
+        <p:nvSpPr>
+          <p:cNvPr id="29" name="TextBox 28"/>
           <p:cNvSpPr txBox="1"/>
           <p:nvPr/>
         </p:nvSpPr>
         <p:spPr>
           <a:xfrm>
-            <a:off x="5486400" y="2640330"/>
+            <a:off x="4526280" y="2068830"/>
             <a:ext cx="635000" cy="254000"/>
           </a:xfrm>
           <a:prstGeom prst="rect">
@@ -4223,20 +4083,20 @@
               </a:defRPr>
             </a:pPr>
             <a:r>
-              <a:t>a</a:t>
-            </a:r>
-          </a:p>
-        </p:txBody>
-      </p:sp>
-      <p:sp>
-        <p:nvSpPr>
-          <p:cNvPr id="34" name="TextBox 33"/>
+              <a:t>y</a:t>
+            </a:r>
+          </a:p>
+        </p:txBody>
+      </p:sp>
+      <p:sp>
+        <p:nvSpPr>
+          <p:cNvPr id="30" name="TextBox 29"/>
           <p:cNvSpPr txBox="1"/>
           <p:nvPr/>
         </p:nvSpPr>
         <p:spPr>
           <a:xfrm>
-            <a:off x="4503420" y="1885950"/>
+            <a:off x="5029200" y="2617470"/>
             <a:ext cx="635000" cy="254000"/>
           </a:xfrm>
           <a:prstGeom prst="rect">
@@ -4259,20 +4119,20 @@
               </a:defRPr>
             </a:pPr>
             <a:r>
-              <a:t>L</a:t>
-            </a:r>
-          </a:p>
-        </p:txBody>
-      </p:sp>
-      <p:sp>
-        <p:nvSpPr>
-          <p:cNvPr id="35" name="TextBox 34"/>
+              <a:t>a</a:t>
+            </a:r>
+          </a:p>
+        </p:txBody>
+      </p:sp>
+      <p:sp>
+        <p:nvSpPr>
+          <p:cNvPr id="31" name="TextBox 30"/>
           <p:cNvSpPr txBox="1"/>
           <p:nvPr/>
         </p:nvSpPr>
         <p:spPr>
           <a:xfrm>
-            <a:off x="5577840" y="1794510"/>
+            <a:off x="4526280" y="2114550"/>
             <a:ext cx="635000" cy="254000"/>
           </a:xfrm>
           <a:prstGeom prst="rect">
@@ -4295,7 +4155,79 @@
               </a:defRPr>
             </a:pPr>
             <a:r>
-              <a:t>y=f(x)</a:t>
+              <a:t>L</a:t>
+            </a:r>
+          </a:p>
+        </p:txBody>
+      </p:sp>
+      <p:sp>
+        <p:nvSpPr>
+          <p:cNvPr id="32" name="TextBox 31"/>
+          <p:cNvSpPr txBox="1"/>
+          <p:nvPr/>
+        </p:nvSpPr>
+        <p:spPr>
+          <a:xfrm>
+            <a:off x="4892040" y="2640330"/>
+            <a:ext cx="635000" cy="254000"/>
+          </a:xfrm>
+          <a:prstGeom prst="rect">
+            <a:avLst/>
+          </a:prstGeom>
+          <a:noFill/>
+        </p:spPr>
+        <p:txBody>
+          <a:bodyPr wrap="none">
+            <a:spAutoFit/>
+          </a:bodyPr>
+          <a:lstStyle/>
+          <a:p>
+            <a:pPr>
+              <a:defRPr sz="1200">
+                <a:solidFill>
+                  <a:srgbClr val="FFFFFF"/>
+                </a:solidFill>
+                <a:latin typeface="Inter"/>
+              </a:defRPr>
+            </a:pPr>
+            <a:r>
+              <a:t>\longleftarrow</a:t>
+            </a:r>
+          </a:p>
+        </p:txBody>
+      </p:sp>
+      <p:sp>
+        <p:nvSpPr>
+          <p:cNvPr id="33" name="TextBox 32"/>
+          <p:cNvSpPr txBox="1"/>
+          <p:nvPr/>
+        </p:nvSpPr>
+        <p:spPr>
+          <a:xfrm>
+            <a:off x="5166360" y="2640330"/>
+            <a:ext cx="635000" cy="254000"/>
+          </a:xfrm>
+          <a:prstGeom prst="rect">
+            <a:avLst/>
+          </a:prstGeom>
+          <a:noFill/>
+        </p:spPr>
+        <p:txBody>
+          <a:bodyPr wrap="none">
+            <a:spAutoFit/>
+          </a:bodyPr>
+          <a:lstStyle/>
+          <a:p>
+            <a:pPr>
+              <a:defRPr sz="1200">
+                <a:solidFill>
+                  <a:srgbClr val="FFFFFF"/>
+                </a:solidFill>
+                <a:latin typeface="Inter"/>
+              </a:defRPr>
+            </a:pPr>
+            <a:r>
+              <a:t>\longrightarrow</a:t>
             </a:r>
           </a:p>
         </p:txBody>
